--- a/slides/mapreduce/mapreduce_by_Mahmoud_Parsian/08_Introduction_to_HDFS.pptx
+++ b/slides/mapreduce/mapreduce_by_Mahmoud_Parsian/08_Introduction_to_HDFS.pptx
@@ -257,7 +257,7 @@
           <a:p>
             <a:fld id="{D4F90C4B-6861-9047-AA41-73DB37431590}" type="datetimeFigureOut">
               <a:rPr lang="en-US" smtClean="0"/>
-              <a:t>5/6/22</a:t>
+              <a:t>8/30/26</a:t>
             </a:fld>
             <a:endParaRPr lang="en-US"/>
           </a:p>
@@ -423,7 +423,7 @@
           <a:p>
             <a:fld id="{A4F88AF8-1A70-49DA-8521-47D5E6F867E9}" type="datetimeFigureOut">
               <a:rPr lang="en-GB" smtClean="0"/>
-              <a:t>06/05/2022</a:t>
+              <a:t>30/08/2026</a:t>
             </a:fld>
             <a:endParaRPr lang="en-GB"/>
           </a:p>
@@ -10720,7 +10720,7 @@
         <p:spPr>
           <a:xfrm>
             <a:off x="410534" y="3333786"/>
-            <a:ext cx="3970865" cy="523220"/>
+            <a:ext cx="3970865" cy="553998"/>
           </a:xfrm>
           <a:prstGeom prst="rect">
             <a:avLst/>
@@ -10734,12 +10734,12 @@
           <a:lstStyle/>
           <a:p>
             <a:r>
-              <a:rPr lang="en-US" sz="1600" dirty="0">
+              <a:rPr lang="en-US" dirty="0">
                 <a:solidFill>
                   <a:srgbClr val="7030A0"/>
                 </a:solidFill>
               </a:rPr>
-              <a:t>Mahmoud (Max) Parsian</a:t>
+              <a:t>Mahmoud Parsian</a:t>
             </a:r>
           </a:p>
           <a:p>
@@ -10895,11 +10895,11 @@
                   </a:outerShdw>
                 </a:effectLst>
               </a:rPr>
-              <a:t>norm </a:t>
+              <a:t>the norm </a:t>
             </a:r>
             <a:r>
               <a:rPr lang="en-US" sz="3800" dirty="0"/>
-              <a:t> in commodity hardware</a:t>
+              <a:t>in commodity hardware</a:t>
             </a:r>
           </a:p>
           <a:p>
@@ -10991,7 +10991,7 @@
                   <a:srgbClr val="663300"/>
                 </a:solidFill>
               </a:rPr>
-              <a:t>lost 1600 of 1800 machines once!</a:t>
+              <a:t>lost 1600 of 1800 machines once</a:t>
             </a:r>
             <a:r>
               <a:rPr lang="en-US" dirty="0"/>
@@ -11003,7 +11003,7 @@
                   <a:srgbClr val="CC00CC"/>
                 </a:solidFill>
               </a:rPr>
-              <a:t>finished fine </a:t>
+              <a:t>finished fine!</a:t>
             </a:r>
           </a:p>
         </p:txBody>
@@ -12131,7 +12131,7 @@
                   <a:schemeClr val="tx2"/>
                 </a:solidFill>
               </a:rPr>
-              <a:t>- Other distributed applications are built on top of HDFS </a:t>
+              <a:t>- other distributed applications are built on top of HDFS </a:t>
             </a:r>
           </a:p>
           <a:p>
@@ -12496,7 +12496,7 @@
                   <a:schemeClr val="tx2"/>
                 </a:solidFill>
               </a:rPr>
-              <a:t>Can not update/</a:t>
+              <a:t>Cannot update/</a:t>
             </a:r>
             <a:r>
               <a:rPr lang="de-CH" sz="2933" dirty="0" err="1">
@@ -13426,7 +13426,7 @@
                   <a:schemeClr val="tx2"/>
                 </a:solidFill>
               </a:rPr>
-              <a:t> = Block3 = 16 MB </a:t>
+              <a:t> = Block4 = 16 MB </a:t>
             </a:r>
           </a:p>
           <a:p>
@@ -13441,7 +13441,7 @@
                   <a:schemeClr val="tx2"/>
                 </a:solidFill>
               </a:rPr>
-              <a:t>NOTE: the whole data block of 128 MB is used for 16 MB</a:t>
+              <a:t>NOTE: the whole 128 MB block is allocated even though only 16 MB of it is used</a:t>
             </a:r>
           </a:p>
           <a:p>
@@ -15861,7 +15861,7 @@
           <a:p>
             <a:r>
               <a:rPr lang="en-US" sz="2800" dirty="0"/>
-              <a:t>We need 5 blocks to store file SAMPLE.TXT:</a:t>
+              <a:t>We need 4 blocks to store file SAMPLE.TXT:</a:t>
             </a:r>
           </a:p>
           <a:p>
@@ -16618,7 +16618,7 @@
                   <a:srgbClr val="00FF00"/>
                 </a:highlight>
               </a:rPr>
-              <a:t>With replication of 5, only 40 TB is useable </a:t>
+              <a:t>With replication of 5, only 40 TB is usable </a:t>
             </a:r>
             <a:r>
               <a:rPr lang="en-GB" sz="3200" dirty="0">
@@ -17323,7 +17323,7 @@
                   <a:schemeClr val="tx2"/>
                 </a:solidFill>
               </a:rPr>
-              <a:t>With replication Factor of </a:t>
+              <a:t>With replication factor of </a:t>
             </a:r>
             <a:r>
               <a:rPr lang="en-GB" sz="3200" b="1" dirty="0">
@@ -17630,7 +17630,7 @@
                   <a:schemeClr val="tx2"/>
                 </a:solidFill>
               </a:rPr>
-              <a:t>With replication Factor of </a:t>
+              <a:t>With replication factor of </a:t>
             </a:r>
             <a:r>
               <a:rPr lang="en-GB" sz="3200" b="1" dirty="0">
@@ -18195,7 +18195,7 @@
                   <a:schemeClr val="tx2"/>
                 </a:solidFill>
               </a:rPr>
-              <a:t>File and Directory permissions are same like in POSIX</a:t>
+              <a:t>File and Directory permissions are the same as in POSIX</a:t>
             </a:r>
           </a:p>
           <a:p>
@@ -18265,7 +18265,7 @@
                   <a:schemeClr val="tx2"/>
                 </a:solidFill>
               </a:rPr>
-              <a:t>ACLs are used for implemention permissions that differ from natural hierarchy of users and groups</a:t>
+              <a:t>ACLs are used for implementing permissions that differ from natural hierarchy of users and groups</a:t>
             </a:r>
           </a:p>
           <a:p>
@@ -19282,7 +19282,7 @@
             </a:pPr>
             <a:r>
               <a:rPr lang="en-US" sz="3600" dirty="0"/>
-              <a:t>However, the command line is one of the simplest and most familiar</a:t>
+              <a:t>However, the command line is one of the simplest and most familiar interfaces</a:t>
             </a:r>
           </a:p>
         </p:txBody>
@@ -22218,7 +22218,7 @@
             </a:r>
             <a:r>
               <a:rPr lang="en-US" sz="4000" dirty="0" err="1"/>
-              <a:t>Adminstration</a:t>
+              <a:t>Administration</a:t>
             </a:r>
             <a:r>
               <a:rPr lang="en-US" sz="4000" dirty="0"/>
@@ -23326,7 +23326,7 @@
             </a:br>
             <a:r>
               <a:rPr lang="en-US" dirty="0"/>
-              <a:t>E = Executor service</a:t>
+              <a:t>. E = Executor service</a:t>
             </a:r>
           </a:p>
         </p:txBody>
@@ -23526,7 +23526,7 @@
             </a:r>
             <a:r>
               <a:rPr lang="en-US" sz="2400" dirty="0"/>
-              <a:t>of data per day in 2020</a:t>
+              <a:t>of data per day in 2020.</a:t>
             </a:r>
           </a:p>
           <a:p>
@@ -25767,7 +25767,7 @@
                   <a:schemeClr val="tx2"/>
                 </a:solidFill>
               </a:rPr>
-              <a:t>  (master node):</a:t>
+              <a:t> (master node):</a:t>
             </a:r>
           </a:p>
           <a:p>
@@ -25835,7 +25835,7 @@
                   <a:schemeClr val="tx2"/>
                 </a:solidFill>
               </a:rPr>
-              <a:t> Which data nodes those blocks are stored (manages metadata)</a:t>
+              <a:t> Which data nodes those blocks are stored on (manages metadata)</a:t>
             </a:r>
           </a:p>
           <a:p>
@@ -25858,7 +25858,7 @@
                   <a:schemeClr val="tx2"/>
                 </a:solidFill>
               </a:rPr>
-              <a:t> :- (worker node)</a:t>
+              <a:t> (worker node):</a:t>
             </a:r>
           </a:p>
           <a:p>
